--- a/activity/M04A02/M04A02.pptx
+++ b/activity/M04A02/M04A02.pptx
@@ -146,6 +146,30 @@
 
 <file path=ppt/changesInfos/changesInfo1.xml><?xml version="1.0" encoding="utf-8"?>
 <pc:chgInfo xmlns:a="http://schemas.openxmlformats.org/drawingml/2006/main" xmlns:r="http://schemas.openxmlformats.org/officeDocument/2006/relationships" xmlns:ac="http://schemas.microsoft.com/office/drawing/2013/main/command" xmlns:pc="http://schemas.microsoft.com/office/powerpoint/2013/main/command">
+  <pc:docChgLst>
+    <pc:chgData name="WILLIAM RICARDO AGUILAR PIÑA" userId="25538c52-b196-49fc-9025-2dd86a54f18a" providerId="ADAL" clId="{1F73B41C-CB35-4CC1-A5D8-5E3ED2B6A24B}"/>
+    <pc:docChg chg="modSld">
+      <pc:chgData name="WILLIAM RICARDO AGUILAR PIÑA" userId="25538c52-b196-49fc-9025-2dd86a54f18a" providerId="ADAL" clId="{1F73B41C-CB35-4CC1-A5D8-5E3ED2B6A24B}" dt="2022-11-25T14:37:44.157" v="0" actId="1076"/>
+      <pc:docMkLst>
+        <pc:docMk/>
+      </pc:docMkLst>
+      <pc:sldChg chg="modSp mod">
+        <pc:chgData name="WILLIAM RICARDO AGUILAR PIÑA" userId="25538c52-b196-49fc-9025-2dd86a54f18a" providerId="ADAL" clId="{1F73B41C-CB35-4CC1-A5D8-5E3ED2B6A24B}" dt="2022-11-25T14:37:44.157" v="0" actId="1076"/>
+        <pc:sldMkLst>
+          <pc:docMk/>
+          <pc:sldMk cId="2222802431" sldId="316"/>
+        </pc:sldMkLst>
+        <pc:picChg chg="mod">
+          <ac:chgData name="WILLIAM RICARDO AGUILAR PIÑA" userId="25538c52-b196-49fc-9025-2dd86a54f18a" providerId="ADAL" clId="{1F73B41C-CB35-4CC1-A5D8-5E3ED2B6A24B}" dt="2022-11-25T14:37:44.157" v="0" actId="1076"/>
+          <ac:picMkLst>
+            <pc:docMk/>
+            <pc:sldMk cId="2222802431" sldId="316"/>
+            <ac:picMk id="16" creationId="{5E97CCAC-02F1-4D53-A254-27E5D0783D1A}"/>
+          </ac:picMkLst>
+        </pc:picChg>
+      </pc:sldChg>
+    </pc:docChg>
+  </pc:docChgLst>
   <pc:docChgLst>
     <pc:chgData name="WILLIAM RICARDO AGUILAR PIÑA" userId="25538c52-b196-49fc-9025-2dd86a54f18a" providerId="ADAL" clId="{B5F22FE6-7432-482A-8D29-7597B59CF30A}"/>
     <pc:docChg chg="custSel addSld delSld modSld">
@@ -894,30 +918,6 @@
       </pc:sldChg>
     </pc:docChg>
   </pc:docChgLst>
-  <pc:docChgLst>
-    <pc:chgData name="WILLIAM RICARDO AGUILAR PIÑA" userId="25538c52-b196-49fc-9025-2dd86a54f18a" providerId="ADAL" clId="{1F73B41C-CB35-4CC1-A5D8-5E3ED2B6A24B}"/>
-    <pc:docChg chg="modSld">
-      <pc:chgData name="WILLIAM RICARDO AGUILAR PIÑA" userId="25538c52-b196-49fc-9025-2dd86a54f18a" providerId="ADAL" clId="{1F73B41C-CB35-4CC1-A5D8-5E3ED2B6A24B}" dt="2022-11-25T14:37:44.157" v="0" actId="1076"/>
-      <pc:docMkLst>
-        <pc:docMk/>
-      </pc:docMkLst>
-      <pc:sldChg chg="modSp mod">
-        <pc:chgData name="WILLIAM RICARDO AGUILAR PIÑA" userId="25538c52-b196-49fc-9025-2dd86a54f18a" providerId="ADAL" clId="{1F73B41C-CB35-4CC1-A5D8-5E3ED2B6A24B}" dt="2022-11-25T14:37:44.157" v="0" actId="1076"/>
-        <pc:sldMkLst>
-          <pc:docMk/>
-          <pc:sldMk cId="2222802431" sldId="316"/>
-        </pc:sldMkLst>
-        <pc:picChg chg="mod">
-          <ac:chgData name="WILLIAM RICARDO AGUILAR PIÑA" userId="25538c52-b196-49fc-9025-2dd86a54f18a" providerId="ADAL" clId="{1F73B41C-CB35-4CC1-A5D8-5E3ED2B6A24B}" dt="2022-11-25T14:37:44.157" v="0" actId="1076"/>
-          <ac:picMkLst>
-            <pc:docMk/>
-            <pc:sldMk cId="2222802431" sldId="316"/>
-            <ac:picMk id="16" creationId="{5E97CCAC-02F1-4D53-A254-27E5D0783D1A}"/>
-          </ac:picMkLst>
-        </pc:picChg>
-      </pc:sldChg>
-    </pc:docChg>
-  </pc:docChgLst>
 </pc:chgInfo>
 </file>
 
@@ -1004,7 +1004,7 @@
             <a:fld id="{53CE91DE-ABC6-4D22-89A0-1765B629FB43}" type="datetimeFigureOut">
               <a:rPr lang="es-CO" smtClean="0"/>
               <a:pPr/>
-              <a:t>25/11/2022</a:t>
+              <a:t>21/11/2025</a:t>
             </a:fld>
             <a:endParaRPr lang="es-CO"/>
           </a:p>
@@ -2902,7 +2902,7 @@
             <a:fld id="{43DF08CB-A55A-40B1-AEFD-F19B3CFD19B5}" type="datetimeFigureOut">
               <a:rPr lang="es-CO" smtClean="0"/>
               <a:pPr/>
-              <a:t>25/11/2022</a:t>
+              <a:t>21/11/2025</a:t>
             </a:fld>
             <a:endParaRPr lang="es-CO"/>
           </a:p>
@@ -3069,7 +3069,7 @@
             <a:fld id="{43DF08CB-A55A-40B1-AEFD-F19B3CFD19B5}" type="datetimeFigureOut">
               <a:rPr lang="es-CO" smtClean="0"/>
               <a:pPr/>
-              <a:t>25/11/2022</a:t>
+              <a:t>21/11/2025</a:t>
             </a:fld>
             <a:endParaRPr lang="es-CO"/>
           </a:p>
@@ -3246,7 +3246,7 @@
             <a:fld id="{43DF08CB-A55A-40B1-AEFD-F19B3CFD19B5}" type="datetimeFigureOut">
               <a:rPr lang="es-CO" smtClean="0"/>
               <a:pPr/>
-              <a:t>25/11/2022</a:t>
+              <a:t>21/11/2025</a:t>
             </a:fld>
             <a:endParaRPr lang="es-CO"/>
           </a:p>
@@ -3413,7 +3413,7 @@
             <a:fld id="{43DF08CB-A55A-40B1-AEFD-F19B3CFD19B5}" type="datetimeFigureOut">
               <a:rPr lang="es-CO" smtClean="0"/>
               <a:pPr/>
-              <a:t>25/11/2022</a:t>
+              <a:t>21/11/2025</a:t>
             </a:fld>
             <a:endParaRPr lang="es-CO"/>
           </a:p>
@@ -3656,7 +3656,7 @@
             <a:fld id="{43DF08CB-A55A-40B1-AEFD-F19B3CFD19B5}" type="datetimeFigureOut">
               <a:rPr lang="es-CO" smtClean="0"/>
               <a:pPr/>
-              <a:t>25/11/2022</a:t>
+              <a:t>21/11/2025</a:t>
             </a:fld>
             <a:endParaRPr lang="es-CO"/>
           </a:p>
@@ -3941,7 +3941,7 @@
             <a:fld id="{43DF08CB-A55A-40B1-AEFD-F19B3CFD19B5}" type="datetimeFigureOut">
               <a:rPr lang="es-CO" smtClean="0"/>
               <a:pPr/>
-              <a:t>25/11/2022</a:t>
+              <a:t>21/11/2025</a:t>
             </a:fld>
             <a:endParaRPr lang="es-CO"/>
           </a:p>
@@ -4360,7 +4360,7 @@
             <a:fld id="{43DF08CB-A55A-40B1-AEFD-F19B3CFD19B5}" type="datetimeFigureOut">
               <a:rPr lang="es-CO" smtClean="0"/>
               <a:pPr/>
-              <a:t>25/11/2022</a:t>
+              <a:t>21/11/2025</a:t>
             </a:fld>
             <a:endParaRPr lang="es-CO"/>
           </a:p>
@@ -4475,7 +4475,7 @@
             <a:fld id="{43DF08CB-A55A-40B1-AEFD-F19B3CFD19B5}" type="datetimeFigureOut">
               <a:rPr lang="es-CO" smtClean="0"/>
               <a:pPr/>
-              <a:t>25/11/2022</a:t>
+              <a:t>21/11/2025</a:t>
             </a:fld>
             <a:endParaRPr lang="es-CO"/>
           </a:p>
@@ -4567,7 +4567,7 @@
             <a:fld id="{43DF08CB-A55A-40B1-AEFD-F19B3CFD19B5}" type="datetimeFigureOut">
               <a:rPr lang="es-CO" smtClean="0"/>
               <a:pPr/>
-              <a:t>25/11/2022</a:t>
+              <a:t>21/11/2025</a:t>
             </a:fld>
             <a:endParaRPr lang="es-CO"/>
           </a:p>
@@ -4841,7 +4841,7 @@
             <a:fld id="{43DF08CB-A55A-40B1-AEFD-F19B3CFD19B5}" type="datetimeFigureOut">
               <a:rPr lang="es-CO" smtClean="0"/>
               <a:pPr/>
-              <a:t>25/11/2022</a:t>
+              <a:t>21/11/2025</a:t>
             </a:fld>
             <a:endParaRPr lang="es-CO"/>
           </a:p>
@@ -5091,7 +5091,7 @@
             <a:fld id="{43DF08CB-A55A-40B1-AEFD-F19B3CFD19B5}" type="datetimeFigureOut">
               <a:rPr lang="es-CO" smtClean="0"/>
               <a:pPr/>
-              <a:t>25/11/2022</a:t>
+              <a:t>21/11/2025</a:t>
             </a:fld>
             <a:endParaRPr lang="es-CO"/>
           </a:p>
@@ -5304,7 +5304,7 @@
             <a:fld id="{43DF08CB-A55A-40B1-AEFD-F19B3CFD19B5}" type="datetimeFigureOut">
               <a:rPr lang="es-CO" smtClean="0"/>
               <a:pPr/>
-              <a:t>25/11/2022</a:t>
+              <a:t>21/11/2025</a:t>
             </a:fld>
             <a:endParaRPr lang="es-CO"/>
           </a:p>
